--- a/CalendarioAgo26/Presentaciones/2_DireccionamientoIPv4_alumnos_SOLUCION.pptx
+++ b/CalendarioAgo26/Presentaciones/2_DireccionamientoIPv4_alumnos_SOLUCION.pptx
@@ -129,6 +129,43 @@
 </p:presentation>
 </file>
 
+<file path=ppt/revisionInfo.xml><?xml version="1.0" encoding="utf-8"?>
+<p1510:revInfo xmlns:a="http://schemas.openxmlformats.org/drawingml/2006/main" xmlns:r="http://schemas.openxmlformats.org/officeDocument/2006/relationships" xmlns:p1510="http://schemas.microsoft.com/office/powerpoint/2015/10/main">
+  <p1510:revLst>
+    <p1510:client id="{59F4705E-2A32-4DA2-8EEA-C9EF51589097}" v="3" dt="2026-08-10T00:56:19.522"/>
+  </p1510:revLst>
+</p1510:revInfo>
+</file>
+
+<file path=ppt/changesInfos/changesInfo1.xml><?xml version="1.0" encoding="utf-8"?>
+<pc:chgInfo xmlns:a="http://schemas.openxmlformats.org/drawingml/2006/main" xmlns:r="http://schemas.openxmlformats.org/officeDocument/2006/relationships" xmlns:ac="http://schemas.microsoft.com/office/drawing/2013/main/command" xmlns:pc="http://schemas.microsoft.com/office/powerpoint/2013/main/command">
+  <pc:docChgLst>
+    <pc:chgData name="Lizethe Pérez Fuertes" userId="4ae9ef87-2a7d-42f8-8dfa-0a501a9e2ff4" providerId="ADAL" clId="{FDDD45CB-1330-4033-A842-3D2746AFF7C7}"/>
+    <pc:docChg chg="custSel modSld">
+      <pc:chgData name="Lizethe Pérez Fuertes" userId="4ae9ef87-2a7d-42f8-8dfa-0a501a9e2ff4" providerId="ADAL" clId="{FDDD45CB-1330-4033-A842-3D2746AFF7C7}" dt="2026-08-10T00:58:42.925" v="136" actId="6549"/>
+      <pc:docMkLst>
+        <pc:docMk/>
+      </pc:docMkLst>
+      <pc:sldChg chg="modSp mod">
+        <pc:chgData name="Lizethe Pérez Fuertes" userId="4ae9ef87-2a7d-42f8-8dfa-0a501a9e2ff4" providerId="ADAL" clId="{FDDD45CB-1330-4033-A842-3D2746AFF7C7}" dt="2026-08-10T00:58:42.925" v="136" actId="6549"/>
+        <pc:sldMkLst>
+          <pc:docMk/>
+          <pc:sldMk cId="1515272197" sldId="304"/>
+        </pc:sldMkLst>
+        <pc:graphicFrameChg chg="mod modGraphic">
+          <ac:chgData name="Lizethe Pérez Fuertes" userId="4ae9ef87-2a7d-42f8-8dfa-0a501a9e2ff4" providerId="ADAL" clId="{FDDD45CB-1330-4033-A842-3D2746AFF7C7}" dt="2026-08-10T00:58:42.925" v="136" actId="6549"/>
+          <ac:graphicFrameMkLst>
+            <pc:docMk/>
+            <pc:sldMk cId="1515272197" sldId="304"/>
+            <ac:graphicFrameMk id="4" creationId="{E8EB963D-A592-29D6-881E-30FF03114551}"/>
+          </ac:graphicFrameMkLst>
+        </pc:graphicFrameChg>
+      </pc:sldChg>
+    </pc:docChg>
+  </pc:docChgLst>
+</pc:chgInfo>
+</file>
+
 <file path=ppt/notesMasters/notesMaster1.xml><?xml version="1.0" encoding="utf-8"?>
 <p:notesMaster xmlns:a="http://schemas.openxmlformats.org/drawingml/2006/main" xmlns:r="http://schemas.openxmlformats.org/officeDocument/2006/relationships" xmlns:p="http://schemas.openxmlformats.org/presentationml/2006/main">
   <p:cSld>
@@ -211,7 +248,7 @@
           <a:p>
             <a:fld id="{2D445F07-8756-451B-A938-0248325FC7BB}" type="datetimeFigureOut">
               <a:rPr lang="es-MX" smtClean="0"/>
-              <a:t>11/02/2024</a:t>
+              <a:t>09/08/2026</a:t>
             </a:fld>
             <a:endParaRPr lang="es-MX" dirty="0"/>
           </a:p>
@@ -370,7 +407,7 @@
           <a:p>
             <a:fld id="{5993AEC0-242E-4FA7-9D3C-51E1036AC3CB}" type="slidenum">
               <a:rPr lang="es-MX" smtClean="0"/>
-              <a:t>‹#›</a:t>
+              <a:t>‹Nº›</a:t>
             </a:fld>
             <a:endParaRPr lang="es-MX" dirty="0"/>
           </a:p>
@@ -859,7 +896,7 @@
           <a:p>
             <a:fld id="{5E75A0DC-66C6-4CEC-A5EB-F8C97CEC3796}" type="datetimeFigureOut">
               <a:rPr lang="es-MX" smtClean="0"/>
-              <a:t>11/02/2024</a:t>
+              <a:t>09/08/2026</a:t>
             </a:fld>
             <a:endParaRPr lang="es-MX" dirty="0"/>
           </a:p>
@@ -901,7 +938,7 @@
           <a:p>
             <a:fld id="{C077EE1E-7A06-4E7F-9AFB-189FC69B7B0C}" type="slidenum">
               <a:rPr lang="es-MX" smtClean="0"/>
-              <a:t>‹#›</a:t>
+              <a:t>‹Nº›</a:t>
             </a:fld>
             <a:endParaRPr lang="es-MX" dirty="0"/>
           </a:p>
@@ -1029,7 +1066,7 @@
           <a:p>
             <a:fld id="{5E75A0DC-66C6-4CEC-A5EB-F8C97CEC3796}" type="datetimeFigureOut">
               <a:rPr lang="es-MX" smtClean="0"/>
-              <a:t>11/02/2024</a:t>
+              <a:t>09/08/2026</a:t>
             </a:fld>
             <a:endParaRPr lang="es-MX" dirty="0"/>
           </a:p>
@@ -1071,7 +1108,7 @@
           <a:p>
             <a:fld id="{C077EE1E-7A06-4E7F-9AFB-189FC69B7B0C}" type="slidenum">
               <a:rPr lang="es-MX" smtClean="0"/>
-              <a:t>‹#›</a:t>
+              <a:t>‹Nº›</a:t>
             </a:fld>
             <a:endParaRPr lang="es-MX" dirty="0"/>
           </a:p>
@@ -1209,7 +1246,7 @@
           <a:p>
             <a:fld id="{5E75A0DC-66C6-4CEC-A5EB-F8C97CEC3796}" type="datetimeFigureOut">
               <a:rPr lang="es-MX" smtClean="0"/>
-              <a:t>11/02/2024</a:t>
+              <a:t>09/08/2026</a:t>
             </a:fld>
             <a:endParaRPr lang="es-MX" dirty="0"/>
           </a:p>
@@ -1251,7 +1288,7 @@
           <a:p>
             <a:fld id="{C077EE1E-7A06-4E7F-9AFB-189FC69B7B0C}" type="slidenum">
               <a:rPr lang="es-MX" smtClean="0"/>
-              <a:t>‹#›</a:t>
+              <a:t>‹Nº›</a:t>
             </a:fld>
             <a:endParaRPr lang="es-MX" dirty="0"/>
           </a:p>
@@ -1379,7 +1416,7 @@
           <a:p>
             <a:fld id="{5E75A0DC-66C6-4CEC-A5EB-F8C97CEC3796}" type="datetimeFigureOut">
               <a:rPr lang="es-MX" smtClean="0"/>
-              <a:t>11/02/2024</a:t>
+              <a:t>09/08/2026</a:t>
             </a:fld>
             <a:endParaRPr lang="es-MX" dirty="0"/>
           </a:p>
@@ -1421,7 +1458,7 @@
           <a:p>
             <a:fld id="{C077EE1E-7A06-4E7F-9AFB-189FC69B7B0C}" type="slidenum">
               <a:rPr lang="es-MX" smtClean="0"/>
-              <a:t>‹#›</a:t>
+              <a:t>‹Nº›</a:t>
             </a:fld>
             <a:endParaRPr lang="es-MX" dirty="0"/>
           </a:p>
@@ -1625,7 +1662,7 @@
           <a:p>
             <a:fld id="{5E75A0DC-66C6-4CEC-A5EB-F8C97CEC3796}" type="datetimeFigureOut">
               <a:rPr lang="es-MX" smtClean="0"/>
-              <a:t>11/02/2024</a:t>
+              <a:t>09/08/2026</a:t>
             </a:fld>
             <a:endParaRPr lang="es-MX" dirty="0"/>
           </a:p>
@@ -1667,7 +1704,7 @@
           <a:p>
             <a:fld id="{C077EE1E-7A06-4E7F-9AFB-189FC69B7B0C}" type="slidenum">
               <a:rPr lang="es-MX" smtClean="0"/>
-              <a:t>‹#›</a:t>
+              <a:t>‹Nº›</a:t>
             </a:fld>
             <a:endParaRPr lang="es-MX" dirty="0"/>
           </a:p>
@@ -1913,7 +1950,7 @@
           <a:p>
             <a:fld id="{5E75A0DC-66C6-4CEC-A5EB-F8C97CEC3796}" type="datetimeFigureOut">
               <a:rPr lang="es-MX" smtClean="0"/>
-              <a:t>11/02/2024</a:t>
+              <a:t>09/08/2026</a:t>
             </a:fld>
             <a:endParaRPr lang="es-MX" dirty="0"/>
           </a:p>
@@ -1955,7 +1992,7 @@
           <a:p>
             <a:fld id="{C077EE1E-7A06-4E7F-9AFB-189FC69B7B0C}" type="slidenum">
               <a:rPr lang="es-MX" smtClean="0"/>
-              <a:t>‹#›</a:t>
+              <a:t>‹Nº›</a:t>
             </a:fld>
             <a:endParaRPr lang="es-MX" dirty="0"/>
           </a:p>
@@ -2335,7 +2372,7 @@
           <a:p>
             <a:fld id="{5E75A0DC-66C6-4CEC-A5EB-F8C97CEC3796}" type="datetimeFigureOut">
               <a:rPr lang="es-MX" smtClean="0"/>
-              <a:t>11/02/2024</a:t>
+              <a:t>09/08/2026</a:t>
             </a:fld>
             <a:endParaRPr lang="es-MX" dirty="0"/>
           </a:p>
@@ -2377,7 +2414,7 @@
           <a:p>
             <a:fld id="{C077EE1E-7A06-4E7F-9AFB-189FC69B7B0C}" type="slidenum">
               <a:rPr lang="es-MX" smtClean="0"/>
-              <a:t>‹#›</a:t>
+              <a:t>‹Nº›</a:t>
             </a:fld>
             <a:endParaRPr lang="es-MX" dirty="0"/>
           </a:p>
@@ -2453,7 +2490,7 @@
           <a:p>
             <a:fld id="{5E75A0DC-66C6-4CEC-A5EB-F8C97CEC3796}" type="datetimeFigureOut">
               <a:rPr lang="es-MX" smtClean="0"/>
-              <a:t>11/02/2024</a:t>
+              <a:t>09/08/2026</a:t>
             </a:fld>
             <a:endParaRPr lang="es-MX" dirty="0"/>
           </a:p>
@@ -2495,7 +2532,7 @@
           <a:p>
             <a:fld id="{C077EE1E-7A06-4E7F-9AFB-189FC69B7B0C}" type="slidenum">
               <a:rPr lang="es-MX" smtClean="0"/>
-              <a:t>‹#›</a:t>
+              <a:t>‹Nº›</a:t>
             </a:fld>
             <a:endParaRPr lang="es-MX" dirty="0"/>
           </a:p>
@@ -2548,7 +2585,7 @@
           <a:p>
             <a:fld id="{5E75A0DC-66C6-4CEC-A5EB-F8C97CEC3796}" type="datetimeFigureOut">
               <a:rPr lang="es-MX" smtClean="0"/>
-              <a:t>11/02/2024</a:t>
+              <a:t>09/08/2026</a:t>
             </a:fld>
             <a:endParaRPr lang="es-MX" dirty="0"/>
           </a:p>
@@ -2590,7 +2627,7 @@
           <a:p>
             <a:fld id="{C077EE1E-7A06-4E7F-9AFB-189FC69B7B0C}" type="slidenum">
               <a:rPr lang="es-MX" smtClean="0"/>
-              <a:t>‹#›</a:t>
+              <a:t>‹Nº›</a:t>
             </a:fld>
             <a:endParaRPr lang="es-MX" dirty="0"/>
           </a:p>
@@ -2825,7 +2862,7 @@
           <a:p>
             <a:fld id="{5E75A0DC-66C6-4CEC-A5EB-F8C97CEC3796}" type="datetimeFigureOut">
               <a:rPr lang="es-MX" smtClean="0"/>
-              <a:t>11/02/2024</a:t>
+              <a:t>09/08/2026</a:t>
             </a:fld>
             <a:endParaRPr lang="es-MX" dirty="0"/>
           </a:p>
@@ -2867,7 +2904,7 @@
           <a:p>
             <a:fld id="{C077EE1E-7A06-4E7F-9AFB-189FC69B7B0C}" type="slidenum">
               <a:rPr lang="es-MX" smtClean="0"/>
-              <a:t>‹#›</a:t>
+              <a:t>‹Nº›</a:t>
             </a:fld>
             <a:endParaRPr lang="es-MX" dirty="0"/>
           </a:p>
@@ -3078,7 +3115,7 @@
           <a:p>
             <a:fld id="{5E75A0DC-66C6-4CEC-A5EB-F8C97CEC3796}" type="datetimeFigureOut">
               <a:rPr lang="es-MX" smtClean="0"/>
-              <a:t>11/02/2024</a:t>
+              <a:t>09/08/2026</a:t>
             </a:fld>
             <a:endParaRPr lang="es-MX" dirty="0"/>
           </a:p>
@@ -3120,7 +3157,7 @@
           <a:p>
             <a:fld id="{C077EE1E-7A06-4E7F-9AFB-189FC69B7B0C}" type="slidenum">
               <a:rPr lang="es-MX" smtClean="0"/>
-              <a:t>‹#›</a:t>
+              <a:t>‹Nº›</a:t>
             </a:fld>
             <a:endParaRPr lang="es-MX" dirty="0"/>
           </a:p>
@@ -3291,7 +3328,7 @@
           <a:p>
             <a:fld id="{5E75A0DC-66C6-4CEC-A5EB-F8C97CEC3796}" type="datetimeFigureOut">
               <a:rPr lang="es-MX" smtClean="0"/>
-              <a:t>11/02/2024</a:t>
+              <a:t>09/08/2026</a:t>
             </a:fld>
             <a:endParaRPr lang="es-MX" dirty="0"/>
           </a:p>
@@ -3369,7 +3406,7 @@
           <a:p>
             <a:fld id="{C077EE1E-7A06-4E7F-9AFB-189FC69B7B0C}" type="slidenum">
               <a:rPr lang="es-MX" smtClean="0"/>
-              <a:t>‹#›</a:t>
+              <a:t>‹Nº›</a:t>
             </a:fld>
             <a:endParaRPr lang="es-MX" dirty="0"/>
           </a:p>
@@ -8307,7 +8344,7 @@
           <p:nvPr>
             <p:extLst>
               <p:ext uri="{D42A27DB-BD31-4B8C-83A1-F6EECF244321}">
-                <p14:modId xmlns:p14="http://schemas.microsoft.com/office/powerpoint/2010/main" val="1701130561"/>
+                <p14:modId xmlns:p14="http://schemas.microsoft.com/office/powerpoint/2010/main" val="4063722921"/>
               </p:ext>
             </p:extLst>
           </p:nvPr>
@@ -8565,8 +8602,14 @@
                         <a:rPr lang="es-MX" sz="1600" dirty="0">
                           <a:effectLst/>
                         </a:rPr>
-                        <a:t>10.25.96.2 /22</a:t>
-                      </a:r>
+                        <a:t>182.25.1.194 /27</a:t>
+                      </a:r>
+                      <a:endParaRPr lang="es-MX" sz="1200" dirty="0">
+                        <a:effectLst/>
+                        <a:latin typeface="Calibri" panose="020F0502020204030204" pitchFamily="34" charset="0"/>
+                        <a:ea typeface="Calibri" panose="020F0502020204030204" pitchFamily="34" charset="0"/>
+                        <a:cs typeface="Times New Roman" panose="02020603050405020304" pitchFamily="18" charset="0"/>
+                      </a:endParaRPr>
                     </a:p>
                     <a:p>
                       <a:pPr algn="ctr"/>
@@ -8598,7 +8641,7 @@
                           <a:latin typeface="Arial" panose="020B0604020202020204" pitchFamily="34" charset="0"/>
                           <a:cs typeface="Arial" panose="020B0604020202020204" pitchFamily="34" charset="0"/>
                         </a:rPr>
-                        <a:t>A</a:t>
+                        <a:t>B</a:t>
                       </a:r>
                       <a:endParaRPr lang="es-MX" sz="1400" b="1" dirty="0">
                         <a:effectLst/>
@@ -8628,10 +8671,24 @@
                           <a:latin typeface="Arial" panose="020B0604020202020204" pitchFamily="34" charset="0"/>
                           <a:cs typeface="Arial" panose="020B0604020202020204" pitchFamily="34" charset="0"/>
                         </a:rPr>
-                        <a:t>255.255.252.0</a:t>
+                        <a:t>255.255.255.</a:t>
+                      </a:r>
+                      <a:r>
+                        <a:rPr lang="en-US" sz="1400" b="1" dirty="0">
+                          <a:effectLst/>
+                          <a:highlight>
+                            <a:srgbClr val="FFFF00"/>
+                          </a:highlight>
+                          <a:latin typeface="Arial" panose="020B0604020202020204" pitchFamily="34" charset="0"/>
+                          <a:cs typeface="Arial" panose="020B0604020202020204" pitchFamily="34" charset="0"/>
+                        </a:rPr>
+                        <a:t>224</a:t>
                       </a:r>
                       <a:endParaRPr lang="es-MX" sz="1400" b="1" dirty="0">
                         <a:effectLst/>
+                        <a:highlight>
+                          <a:srgbClr val="FFFF00"/>
+                        </a:highlight>
                         <a:latin typeface="Arial" panose="020B0604020202020204" pitchFamily="34" charset="0"/>
                         <a:ea typeface="Calibri" panose="020F0502020204030204" pitchFamily="34" charset="0"/>
                         <a:cs typeface="Arial" panose="020B0604020202020204" pitchFamily="34" charset="0"/>
@@ -8659,7 +8716,55 @@
                           <a:ea typeface="Times New Roman" panose="02020603050405020304" pitchFamily="18" charset="0"/>
                           <a:cs typeface="Arial" panose="020B0604020202020204" pitchFamily="34" charset="0"/>
                         </a:rPr>
-                        <a:t>10.25.96.0</a:t>
+                        <a:t>182.25.1.192</a:t>
+                      </a:r>
+                    </a:p>
+                    <a:p>
+                      <a:pPr algn="ctr"/>
+                      <a:r>
+                        <a:rPr lang="es-MX" sz="1400" b="1" dirty="0">
+                          <a:effectLst/>
+                          <a:latin typeface="Arial" panose="020B0604020202020204" pitchFamily="34" charset="0"/>
+                          <a:ea typeface="Times New Roman" panose="02020603050405020304" pitchFamily="18" charset="0"/>
+                          <a:cs typeface="Arial" panose="020B0604020202020204" pitchFamily="34" charset="0"/>
+                        </a:rPr>
+                        <a:t>1110 0000</a:t>
+                      </a:r>
+                    </a:p>
+                    <a:p>
+                      <a:pPr algn="ctr"/>
+                      <a:r>
+                        <a:rPr lang="es-MX" sz="1400" b="1" dirty="0">
+                          <a:effectLst/>
+                          <a:latin typeface="Arial" panose="020B0604020202020204" pitchFamily="34" charset="0"/>
+                          <a:ea typeface="Times New Roman" panose="02020603050405020304" pitchFamily="18" charset="0"/>
+                          <a:cs typeface="Arial" panose="020B0604020202020204" pitchFamily="34" charset="0"/>
+                        </a:rPr>
+                        <a:t>1100 0100</a:t>
+                      </a:r>
+                    </a:p>
+                    <a:p>
+                      <a:pPr algn="ctr"/>
+                      <a:r>
+                        <a:rPr lang="es-MX" sz="1400" b="1" dirty="0">
+                          <a:effectLst/>
+                          <a:latin typeface="Arial" panose="020B0604020202020204" pitchFamily="34" charset="0"/>
+                          <a:ea typeface="Times New Roman" panose="02020603050405020304" pitchFamily="18" charset="0"/>
+                          <a:cs typeface="Arial" panose="020B0604020202020204" pitchFamily="34" charset="0"/>
+                        </a:rPr>
+                        <a:t>------------------</a:t>
+                      </a:r>
+                    </a:p>
+                    <a:p>
+                      <a:pPr algn="ctr"/>
+                      <a:r>
+                        <a:rPr lang="es-MX" sz="1400" b="1" dirty="0">
+                          <a:effectLst/>
+                          <a:latin typeface="Arial" panose="020B0604020202020204" pitchFamily="34" charset="0"/>
+                          <a:ea typeface="Times New Roman" panose="02020603050405020304" pitchFamily="18" charset="0"/>
+                          <a:cs typeface="Arial" panose="020B0604020202020204" pitchFamily="34" charset="0"/>
+                        </a:rPr>
+                        <a:t>1100 0000</a:t>
                       </a:r>
                     </a:p>
                   </a:txBody>
@@ -8687,7 +8792,22 @@
                           <a:ea typeface="Times New Roman" panose="02020603050405020304" pitchFamily="18" charset="0"/>
                           <a:cs typeface="Arial" panose="020B0604020202020204" pitchFamily="34" charset="0"/>
                         </a:rPr>
-                        <a:t>10.25.99.255</a:t>
+                        <a:t>182.25.1.192+31</a:t>
+                      </a:r>
+                    </a:p>
+                    <a:p>
+                      <a:pPr algn="ctr"/>
+                      <a:r>
+                        <a:rPr lang="es-MX" sz="1400" b="1" dirty="0">
+                          <a:solidFill>
+                            <a:schemeClr val="tx1"/>
+                          </a:solidFill>
+                          <a:effectLst/>
+                          <a:latin typeface="Arial" panose="020B0604020202020204" pitchFamily="34" charset="0"/>
+                          <a:ea typeface="Times New Roman" panose="02020603050405020304" pitchFamily="18" charset="0"/>
+                          <a:cs typeface="Arial" panose="020B0604020202020204" pitchFamily="34" charset="0"/>
+                        </a:rPr>
+                        <a:t>        .255</a:t>
                       </a:r>
                     </a:p>
                   </a:txBody>
@@ -8738,13 +8858,7 @@
                           <a:ea typeface="+mn-ea"/>
                           <a:cs typeface="+mn-cs"/>
                         </a:rPr>
-                        <a:t>8.0.0.0 /9</a:t>
-                      </a:r>
-                      <a:r>
-                        <a:rPr lang="en-US" sz="1200" dirty="0">
-                          <a:effectLst/>
-                        </a:rPr>
-                        <a:t> </a:t>
+                        <a:t>8.129.2.3 /9</a:t>
                       </a:r>
                       <a:endParaRPr lang="es-MX" sz="1200" dirty="0">
                         <a:effectLst/>
@@ -8844,7 +8958,7 @@
                           <a:ea typeface="Times New Roman" panose="02020603050405020304" pitchFamily="18" charset="0"/>
                           <a:cs typeface="Arial" panose="020B0604020202020204" pitchFamily="34" charset="0"/>
                         </a:rPr>
-                        <a:t>8.0.0.0</a:t>
+                        <a:t>8.128.0.0</a:t>
                       </a:r>
                     </a:p>
                   </a:txBody>
@@ -8863,7 +8977,7 @@
                     <a:p>
                       <a:pPr algn="ctr"/>
                       <a:r>
-                        <a:rPr lang="es-MX" sz="1400" b="1" dirty="0">
+                        <a:rPr lang="es-MX" sz="1400" b="1">
                           <a:solidFill>
                             <a:schemeClr val="tx1"/>
                           </a:solidFill>
@@ -8872,8 +8986,17 @@
                           <a:ea typeface="Times New Roman" panose="02020603050405020304" pitchFamily="18" charset="0"/>
                           <a:cs typeface="Arial" panose="020B0604020202020204" pitchFamily="34" charset="0"/>
                         </a:rPr>
-                        <a:t>8.127.255.255</a:t>
-                      </a:r>
+                        <a:t>8.255.255.255</a:t>
+                      </a:r>
+                      <a:endParaRPr lang="es-MX" sz="1400" b="1" dirty="0">
+                        <a:solidFill>
+                          <a:schemeClr val="tx1"/>
+                        </a:solidFill>
+                        <a:effectLst/>
+                        <a:latin typeface="Arial" panose="020B0604020202020204" pitchFamily="34" charset="0"/>
+                        <a:ea typeface="Times New Roman" panose="02020603050405020304" pitchFamily="18" charset="0"/>
+                        <a:cs typeface="Arial" panose="020B0604020202020204" pitchFamily="34" charset="0"/>
+                      </a:endParaRPr>
                     </a:p>
                   </a:txBody>
                   <a:tcPr marL="0" marR="0" marT="0" marB="0" anchor="ctr">
